--- a/Cerradura RFID Autónoma de Alta Seguridad.pptx
+++ b/Cerradura RFID Autónoma de Alta Seguridad.pptx
@@ -1142,8 +1142,8 @@
         </p:nvSpPr>
         <p:spPr>
           <a:xfrm>
-            <a:off x="2564954" y="3189635"/>
-            <a:ext cx="4953893" cy="1379190"/>
+            <a:off x="2564954" y="3118644"/>
+            <a:ext cx="4953893" cy="1358354"/>
           </a:xfrm>
           <a:prstGeom prst="rect">
             <a:avLst/>
@@ -1159,7 +1159,7 @@
                 <a:spcPct val="110000"/>
               </a:lnSpc>
               <a:buNone/>
-              <a:defRPr lang="en-US" sz="5400" dirty="0">
+              <a:defRPr lang="en-US" sz="5347" dirty="0">
                 <a:solidFill>
                   <a:srgbClr val="F4F1EA"/>
                 </a:solidFill>
@@ -1176,7 +1176,7 @@
               </a:lnSpc>
               <a:buNone/>
             </a:pPr>
-            <a:endParaRPr lang="en-US" sz="5400" dirty="0"/>
+            <a:endParaRPr lang="en-US" sz="5347" dirty="0"/>
           </a:p>
         </p:txBody>
       </p:sp>
@@ -1191,7 +1191,7 @@
         <p:spPr>
           <a:xfrm>
             <a:off x="2564954" y="812800"/>
-            <a:ext cx="8814246" cy="2072035"/>
+            <a:ext cx="8814246" cy="2001044"/>
           </a:xfrm>
           <a:prstGeom prst="rect">
             <a:avLst/>
@@ -1270,8 +1270,8 @@
         </p:nvSpPr>
         <p:spPr>
           <a:xfrm>
-            <a:off x="2564954" y="3189635"/>
-            <a:ext cx="4953893" cy="1379190"/>
+            <a:off x="2564954" y="3118644"/>
+            <a:ext cx="4953893" cy="1358354"/>
           </a:xfrm>
           <a:prstGeom prst="rect">
             <a:avLst/>
@@ -1287,7 +1287,7 @@
                 <a:spcPct val="110000"/>
               </a:lnSpc>
               <a:buNone/>
-              <a:defRPr lang="en-US" sz="5400" dirty="0">
+              <a:defRPr lang="en-US" sz="5347" dirty="0">
                 <a:solidFill>
                   <a:srgbClr val="F4F1EA"/>
                 </a:solidFill>
@@ -1304,7 +1304,7 @@
               </a:lnSpc>
               <a:buNone/>
             </a:pPr>
-            <a:endParaRPr lang="en-US" sz="5400" dirty="0"/>
+            <a:endParaRPr lang="en-US" sz="5347" dirty="0"/>
           </a:p>
         </p:txBody>
       </p:sp>
@@ -1319,7 +1319,7 @@
         <p:spPr>
           <a:xfrm>
             <a:off x="2564954" y="812800"/>
-            <a:ext cx="8814246" cy="2072035"/>
+            <a:ext cx="8814246" cy="2001044"/>
           </a:xfrm>
           <a:prstGeom prst="rect">
             <a:avLst/>
@@ -1694,13 +1694,13 @@
         </p:nvPicPr>
         <p:blipFill>
           <a:blip r:embed="rId2"/>
-          <a:srcRect l="0" r="0" t="0" b="0"/>
+          <a:srcRect l="-1111" r="-1111" t="0" b="0"/>
           <a:stretch/>
         </p:blipFill>
         <p:spPr>
           <a:xfrm>
-            <a:off x="812800" y="918270"/>
-            <a:ext cx="1397000" cy="1397000"/>
+            <a:off x="812800" y="812800"/>
+            <a:ext cx="1397000" cy="1366639"/>
           </a:xfrm>
           <a:prstGeom prst="rect">
             <a:avLst/>
@@ -1715,8 +1715,8 @@
         </p:nvSpPr>
         <p:spPr>
           <a:xfrm>
-            <a:off x="812800" y="2620070"/>
-            <a:ext cx="10883392" cy="309860"/>
+            <a:off x="812800" y="2484239"/>
+            <a:ext cx="10883392" cy="303709"/>
           </a:xfrm>
           <a:prstGeom prst="rect">
             <a:avLst/>
@@ -1732,12 +1732,12 @@
           <a:p>
             <a:pPr algn="l" indent="0" marL="0">
               <a:lnSpc>
-                <a:spcPts val="2240"/>
+                <a:spcPts val="2219"/>
               </a:lnSpc>
               <a:buNone/>
             </a:pPr>
             <a:r>
-              <a:rPr lang="en-US" sz="1600" spc="200" kern="0" dirty="0">
+              <a:rPr lang="en-US" sz="1585" spc="200" kern="0" dirty="0">
                 <a:solidFill>
                   <a:srgbClr val="19C3A6"/>
                 </a:solidFill>
@@ -1747,7 +1747,7 @@
               </a:rPr>
               <a:t>PROYECTO ARDUINO</a:t>
             </a:r>
-            <a:endParaRPr lang="en-US" sz="1600" dirty="0"/>
+            <a:endParaRPr lang="en-US" sz="1585" dirty="0"/>
           </a:p>
         </p:txBody>
       </p:sp>
@@ -1761,8 +1761,8 @@
         </p:nvSpPr>
         <p:spPr>
           <a:xfrm>
-            <a:off x="812800" y="3209330"/>
-            <a:ext cx="6540500" cy="1945580"/>
+            <a:off x="812800" y="3067348"/>
+            <a:ext cx="6540500" cy="1903909"/>
           </a:xfrm>
           <a:prstGeom prst="rect">
             <a:avLst/>
@@ -1778,12 +1778,12 @@
           <a:p>
             <a:pPr algn="l" indent="0" marL="0">
               <a:lnSpc>
-                <a:spcPts val="5040"/>
+                <a:spcPts val="4930"/>
               </a:lnSpc>
               <a:buNone/>
             </a:pPr>
             <a:r>
-              <a:rPr lang="en-US" sz="4800" b="1" i="0" dirty="0">
+              <a:rPr lang="en-US" sz="4695" b="1" i="0" dirty="0">
                 <a:solidFill>
                   <a:srgbClr val="F4F1EA"/>
                 </a:solidFill>
@@ -1793,7 +1793,7 @@
               </a:rPr>
               <a:t>Cerradura RFID Autónoma de Alta Seguridad</a:t>
             </a:r>
-            <a:endParaRPr lang="en-US" sz="4800" dirty="0"/>
+            <a:endParaRPr lang="en-US" sz="4695" dirty="0"/>
           </a:p>
         </p:txBody>
       </p:sp>
@@ -1805,8 +1805,8 @@
         </p:nvSpPr>
         <p:spPr>
           <a:xfrm>
-            <a:off x="812800" y="5434310"/>
-            <a:ext cx="6540500" cy="327620"/>
+            <a:off x="812800" y="5250656"/>
+            <a:ext cx="6540500" cy="616744"/>
           </a:xfrm>
           <a:prstGeom prst="rect">
             <a:avLst/>
@@ -1822,12 +1822,12 @@
           <a:p>
             <a:pPr algn="l" indent="0" marL="0">
               <a:lnSpc>
-                <a:spcPts val="2380"/>
+                <a:spcPts val="2335"/>
               </a:lnSpc>
               <a:buNone/>
             </a:pPr>
             <a:r>
-              <a:rPr lang="en-US" sz="1700" dirty="0">
+              <a:rPr lang="en-US" sz="1668" dirty="0">
                 <a:solidFill>
                   <a:srgbClr val="9FB0C3"/>
                 </a:solidFill>
@@ -1835,9 +1835,9 @@
                 <a:ea typeface="Georgia" pitchFamily="18" charset="-122"/>
                 <a:cs typeface="Georgia" pitchFamily="18" charset="-120"/>
               </a:rPr>
-              <a:t>Control de acceso con tarjeta · [Nombre del estudiante · Curso]</a:t>
-            </a:r>
-            <a:endParaRPr lang="en-US" sz="1700" dirty="0"/>
+              <a:t>Control de acceso con tarjeta · [Cristobal Soto | Dustin Gutierrez · 4°F]</a:t>
+            </a:r>
+            <a:endParaRPr lang="en-US" sz="1668" dirty="0"/>
           </a:p>
         </p:txBody>
       </p:sp>
